--- a/docs/talks/decks/02-lightning-talk.pptx
+++ b/docs/talks/decks/02-lightning-talk.pptx
@@ -598,7 +598,7 @@
           <a:p>
             <a:r>
               <a:rPr lang="en-US" dirty="0"/>
-              <a:t>The disease everyone has: multiplatform games grow multiple implementations of their own rules. Server has the real ones; client re-implements an approximation and inherits rollback/prediction drift; tutorial hardcodes a fake; the port diverges forever. Each copy is a place for rules to disagree — and the disagreement is where the worst bugs live. Wicked Ways refuses the split.</a:t>
+              <a:t>The disease everyone has: multiplatform games grow multiple implementations of their own rules. Server has the real ones; the client re-implements an approximation so the UI feels instant — it guesses each outcome ('prediction') and must undo and re-simulate when the server disagrees ('rollback'); the tutorial hardcodes a fake; the port diverges forever. Each copy is a place for rules to disagree — and the disagreement is where the worst bugs live. Wicked Ways refuses the split.</a:t>
             </a:r>
             <a:endParaRPr lang="en-US" dirty="0"/>
           </a:p>
@@ -774,7 +774,7 @@
           <a:p>
             <a:r>
               <a:rPr lang="en-US" dirty="0"/>
-              <a:t>Three rules, enforced not aspirational. Same genesis + same log = same world, bit for bit, on any machine. This single property is what makes everything on the next slides cheap instead of heroic.</a:t>
+              <a:t>Three rules, enforced not aspirational. Same genesis + same log = same world, bit for bit, on any machine. New wrinkle that proves the rule: physical dice at the table enter the engine as recorded commands on the log, so even real dice keep replays exact. This single property is what makes everything on the next slides cheap instead of heroic.</a:t>
             </a:r>
             <a:endParaRPr lang="en-US" dirty="0"/>
           </a:p>
@@ -862,7 +862,7 @@
           <a:p>
             <a:r>
               <a:rPr lang="en-US" dirty="0"/>
-              <a:t>Commands in: a tagged union. Effects out: mods and scripted content express intent through a closed effect set, applied by clamping appliers behind unforgeable seams. Campaign content is TOML compiled to a loop-free deterministic AST. Consequence: user content cannot corrupt state, cannot introduce nondeterminism, cannot create a second place where rules live.</a:t>
+              <a:t>Commands in: a fixed, enumerated set. Effects out: campaign content and mods never touch state — they return requests from a fixed menu, and the engine applies each one itself through its own guarded setters, clamping values into legal range. Campaign content is TOML (a plain-text config format) compiled into a small no-loops scripting language stored as data. Consequence: user content cannot corrupt state, cannot introduce nondeterminism, cannot create a second place where rules live.</a:t>
             </a:r>
             <a:endParaRPr lang="en-US" dirty="0"/>
           </a:p>
@@ -950,7 +950,7 @@
           <a:p>
             <a:r>
               <a:rPr lang="en-US" dirty="0"/>
-              <a:t>Golden pinning: 256 fixtures, four byte-for-byte gates. Accidental change = CI fails. Intended change = UPDATE_GOLDENS=1, review the behavioral diff like code, commit it. Proof it is not theater: the engine was rewritten TS to Rust against these goldens until output matched byte-for-byte, then the TS was deleted.</a:t>
+              <a:t>Golden pinning: 'goldens' are recorded known-good outputs committed to the repo — 256 of them, four byte-for-byte CI checks. Accidental change = CI fails. Intended change = UPDATE_GOLDENS=1, review the behavioral diff like code, commit it. Proof it is not theater: the engine was rewritten TS to Rust against these goldens until output matched byte-for-byte, then the TS was deleted.</a:t>
             </a:r>
             <a:endParaRPr lang="en-US" dirty="0"/>
           </a:p>
@@ -4475,7 +4475,7 @@
                 <a:ea typeface="Calibri" pitchFamily="34" charset="-122"/>
                 <a:cs typeface="Calibri" pitchFamily="34" charset="-120"/>
               </a:rPr>
-              <a:t>Every roll draws from World.rng (mulberry32); its state rides in the snapshot, so determinism survives save/load.</a:t>
+              <a:t>All rolls draw from World.rng; its state rides in the snapshot. Real table dice enter as recorded commands — replays stay exact.</a:t>
             </a:r>
             <a:endParaRPr lang="en-US" sz="1200" dirty="0"/>
           </a:p>
@@ -6473,7 +6473,7 @@
                 <a:ea typeface="Calibri" pitchFamily="34" charset="-122"/>
                 <a:cs typeface="Calibri" pitchFamily="34" charset="-120"/>
               </a:rPr>
-              <a:t>Content is TOML compiled to a loop-free, deterministic script AST — user content cannot express nondeterminism.</a:t>
+              <a:t>Content compiles to a small no-loops script stored as data — user content cannot express nondeterminism.</a:t>
             </a:r>
             <a:endParaRPr lang="en-US" sz="1400" dirty="0"/>
           </a:p>
@@ -7920,7 +7920,7 @@
                 <a:ea typeface="Calibri" pitchFamily="34" charset="-122"/>
                 <a:cs typeface="Calibri" pitchFamily="34" charset="-120"/>
               </a:rPr>
-              <a:t>The same client crate in a dioxus-desktop webview shell — deliberately workspace-excluded so GTK/WebKit never touches the workspace gates. Ships .deb / .dmg / .msi.</a:t>
+              <a:t>The same client code in a webview shell — kept out of the main build so its OS-level GUI libraries never infect everything else. Ships .deb / .dmg / .msi.</a:t>
             </a:r>
             <a:endParaRPr lang="en-US" sz="1250" dirty="0"/>
           </a:p>
@@ -8091,7 +8091,7 @@
                 <a:ea typeface="Calibri" pitchFamily="34" charset="-122"/>
                 <a:cs typeface="Calibri" pitchFamily="34" charset="-120"/>
               </a:rPr>
-              <a:t>Real e-ink tiles and NFC pieces. The bridge maps the view model to device commands, and device events back to engine commands, over COBS-framed serial. The rules never knew.</a:t>
+              <a:t>Real e-ink tiles, NFC pieces — and real dice: a rolled d20 enters the engine as a recorded command, so replays hold. The bridge maps views to device commands and events back. The rules never knew.</a:t>
             </a:r>
             <a:endParaRPr lang="en-US" sz="1250" dirty="0"/>
           </a:p>
